--- a/open-research-tools/github/github-slides.pptx
+++ b/open-research-tools/github/github-slides.pptx
@@ -22492,7 +22492,7 @@
             </a:r>
             <a:r>
               <a:rPr/>
-              <a:t>, with the contributions of Adam Kenny. This work by Elizabeth Waterfield, Sarah von Grebmer zu Wolfsthurn, and Malika Ihle is licensed under a CC-BY-SA 4.0 </a:t>
+              <a:t>, with the contributions of Adam Kenny. This work by Elizabeth Waterfield, Sarah von Grebmer zu Wolfsthurn, and Malika Ihle is licensed under a </a:t>
             </a:r>
             <a:r>
               <a:rPr>
@@ -22502,7 +22502,7 @@
             </a:r>
             <a:r>
               <a:rPr/>
-              <a:t>. Code snippets are dedicated to the public domain and licensed under a </a:t>
+              <a:t> (CC-BY-SA 4.0). Code snippets are dedicated to the public domain and licensed under a </a:t>
             </a:r>
             <a:r>
               <a:rPr>

--- a/open-research-tools/github/github-slides.pptx
+++ b/open-research-tools/github/github-slides.pptx
@@ -10140,7 +10140,7 @@
             </a:pPr>
             <a:r>
               <a:rPr/>
-              <a:t>30/09/2026</a:t>
+              <a:t>01/10/2026</a:t>
             </a:r>
           </a:p>
         </p:txBody>

--- a/open-research-tools/github/github-slides.pptx
+++ b/open-research-tools/github/github-slides.pptx
@@ -10140,7 +10140,7 @@
             </a:pPr>
             <a:r>
               <a:rPr/>
-              <a:t>01/10/2026</a:t>
+              <a:t>05/10/2026</a:t>
             </a:r>
           </a:p>
         </p:txBody>

--- a/open-research-tools/github/github-slides.pptx
+++ b/open-research-tools/github/github-slides.pptx
@@ -10140,7 +10140,7 @@
             </a:pPr>
             <a:r>
               <a:rPr/>
-              <a:t>05/10/2026</a:t>
+              <a:t>08/10/2026</a:t>
             </a:r>
           </a:p>
         </p:txBody>

--- a/open-research-tools/github/github-slides.pptx
+++ b/open-research-tools/github/github-slides.pptx
@@ -10140,7 +10140,7 @@
             </a:pPr>
             <a:r>
               <a:rPr/>
-              <a:t>08/10/2026</a:t>
+              <a:t>12/10/2026</a:t>
             </a:r>
           </a:p>
         </p:txBody>

--- a/open-research-tools/github/github-slides.pptx
+++ b/open-research-tools/github/github-slides.pptx
@@ -10140,7 +10140,7 @@
             </a:pPr>
             <a:r>
               <a:rPr/>
-              <a:t>12/10/2026</a:t>
+              <a:t>13/10/2026</a:t>
             </a:r>
           </a:p>
         </p:txBody>

--- a/open-research-tools/github/github-slides.pptx
+++ b/open-research-tools/github/github-slides.pptx
@@ -10140,7 +10140,7 @@
             </a:pPr>
             <a:r>
               <a:rPr/>
-              <a:t>13/10/2026</a:t>
+              <a:t>14/10/2026</a:t>
             </a:r>
           </a:p>
         </p:txBody>

--- a/open-research-tools/github/github-slides.pptx
+++ b/open-research-tools/github/github-slides.pptx
@@ -10140,7 +10140,7 @@
             </a:pPr>
             <a:r>
               <a:rPr/>
-              <a:t>14/10/2026</a:t>
+              <a:t>19/10/2026</a:t>
             </a:r>
           </a:p>
         </p:txBody>

--- a/open-research-tools/github/github-slides.pptx
+++ b/open-research-tools/github/github-slides.pptx
@@ -22521,7 +22521,7 @@
             </a:pPr>
             <a:r>
               <a:rPr/>
-              <a:t>Please cite these materials as: Waterfield, E., Ihle, M., &amp; Von Grebmer Zu Wolfsthurn (2026). </a:t>
+              <a:t>Please cite these materials as: Waterfield, E., Ihle, M., &amp; Von Grebmer Zu Wolfsthurn, S. (2026). </a:t>
             </a:r>
             <a:r>
               <a:rPr i="1"/>

--- a/open-research-tools/github/github-slides.pptx
+++ b/open-research-tools/github/github-slides.pptx
@@ -10140,7 +10140,7 @@
             </a:pPr>
             <a:r>
               <a:rPr/>
-              <a:t>19/10/2026</a:t>
+              <a:t>22/10/2026</a:t>
             </a:r>
           </a:p>
         </p:txBody>

--- a/open-research-tools/github/github-slides.pptx
+++ b/open-research-tools/github/github-slides.pptx
@@ -10140,7 +10140,7 @@
             </a:pPr>
             <a:r>
               <a:rPr/>
-              <a:t>22/10/2026</a:t>
+              <a:t>26/10/2026</a:t>
             </a:r>
           </a:p>
         </p:txBody>

--- a/open-research-tools/github/github-slides.pptx
+++ b/open-research-tools/github/github-slides.pptx
@@ -10140,7 +10140,7 @@
             </a:pPr>
             <a:r>
               <a:rPr/>
-              <a:t>26/10/2026</a:t>
+              <a:t>29/10/2026</a:t>
             </a:r>
           </a:p>
         </p:txBody>
